--- a/curriculum/M02/W07/L01/slides.pptx
+++ b/curriculum/M02/W07/L01/slides.pptx
@@ -11063,7 +11063,36 @@
                 <a:ea typeface="Malgun Gothic"/>
                 <a:cs typeface="Malgun Gothic"/>
               </a:rPr>
-              <a:t>로 활성화된다(ATP 소비). 2. </a:t>
+              <a:t>로 활성화된다(ATP 소비).</a:t>
+            </a:r>
+          </a:p>
+          <a:p>
+            <a:pPr>
+              <a:spcAft>
+                <a:spcPts val="900"/>
+              </a:spcAft>
+            </a:pPr>
+            <a:r>
+              <a:rPr sz="1400" b="1" i="0">
+                <a:solidFill>
+                  <a:srgbClr val="F2B705"/>
+                </a:solidFill>
+                <a:latin typeface="Malgun Gothic"/>
+                <a:ea typeface="Malgun Gothic"/>
+                <a:cs typeface="Malgun Gothic"/>
+              </a:rPr>
+              <a:t>•  </a:t>
+            </a:r>
+            <a:r>
+              <a:rPr sz="1400" b="0" i="0">
+                <a:solidFill>
+                  <a:srgbClr val="11202B"/>
+                </a:solidFill>
+                <a:latin typeface="Malgun Gothic"/>
+                <a:ea typeface="Malgun Gothic"/>
+                <a:cs typeface="Malgun Gothic"/>
+              </a:rPr>
+              <a:t>2. </a:t>
             </a:r>
             <a:r>
               <a:rPr sz="1400" b="1" i="0">
@@ -19335,6 +19364,126 @@
               <a:t>그래서 지질 소화·흡수는 다음 네 과제를 차례로 해결하는 과정으로 정리된다.</a:t>
             </a:r>
           </a:p>
+          <a:p>
+            <a:pPr>
+              <a:spcAft>
+                <a:spcPts val="900"/>
+              </a:spcAft>
+            </a:pPr>
+            <a:r>
+              <a:rPr sz="1400" b="1" i="0">
+                <a:solidFill>
+                  <a:srgbClr val="F2B705"/>
+                </a:solidFill>
+                <a:latin typeface="Malgun Gothic"/>
+                <a:ea typeface="Malgun Gothic"/>
+                <a:cs typeface="Malgun Gothic"/>
+              </a:rPr>
+              <a:t>•  </a:t>
+            </a:r>
+            <a:r>
+              <a:rPr sz="1400" b="0" i="0">
+                <a:solidFill>
+                  <a:srgbClr val="11202B"/>
+                </a:solidFill>
+                <a:latin typeface="Malgun Gothic"/>
+                <a:ea typeface="Malgun Gothic"/>
+                <a:cs typeface="Malgun Gothic"/>
+              </a:rPr>
+              <a:t>덩어리를 작은 입자로 쪼개 표면적을 늘린다 — </a:t>
+            </a:r>
+            <a:r>
+              <a:rPr sz="1400" b="1" i="0">
+                <a:solidFill>
+                  <a:srgbClr val="11202B"/>
+                </a:solidFill>
+                <a:latin typeface="Malgun Gothic"/>
+                <a:ea typeface="Malgun Gothic"/>
+                <a:cs typeface="Malgun Gothic"/>
+              </a:rPr>
+              <a:t>emulsification</a:t>
+            </a:r>
+          </a:p>
+          <a:p>
+            <a:pPr>
+              <a:spcAft>
+                <a:spcPts val="900"/>
+              </a:spcAft>
+            </a:pPr>
+            <a:r>
+              <a:rPr sz="1400" b="1" i="0">
+                <a:solidFill>
+                  <a:srgbClr val="F2B705"/>
+                </a:solidFill>
+                <a:latin typeface="Malgun Gothic"/>
+                <a:ea typeface="Malgun Gothic"/>
+                <a:cs typeface="Malgun Gothic"/>
+              </a:rPr>
+              <a:t>•  </a:t>
+            </a:r>
+            <a:r>
+              <a:rPr sz="1400" b="0" i="0">
+                <a:solidFill>
+                  <a:srgbClr val="11202B"/>
+                </a:solidFill>
+                <a:latin typeface="Malgun Gothic"/>
+                <a:ea typeface="Malgun Gothic"/>
+                <a:cs typeface="Malgun Gothic"/>
+              </a:rPr>
+              <a:t>수용성 효소가 계면에서 작동하게 한다 — </a:t>
+            </a:r>
+            <a:r>
+              <a:rPr sz="1400" b="1" i="0">
+                <a:solidFill>
+                  <a:srgbClr val="11202B"/>
+                </a:solidFill>
+                <a:latin typeface="Malgun Gothic"/>
+                <a:ea typeface="Malgun Gothic"/>
+                <a:cs typeface="Malgun Gothic"/>
+              </a:rPr>
+              <a:t>pancreatic lipase와 colipase</a:t>
+            </a:r>
+          </a:p>
+          <a:p>
+            <a:pPr>
+              <a:spcAft>
+                <a:spcPts val="900"/>
+              </a:spcAft>
+            </a:pPr>
+            <a:r>
+              <a:rPr sz="1400" b="1" i="0">
+                <a:solidFill>
+                  <a:srgbClr val="F2B705"/>
+                </a:solidFill>
+                <a:latin typeface="Malgun Gothic"/>
+                <a:ea typeface="Malgun Gothic"/>
+                <a:cs typeface="Malgun Gothic"/>
+              </a:rPr>
+              <a:t>•  </a:t>
+            </a:r>
+            <a:r>
+              <a:rPr sz="1400" b="0" i="0">
+                <a:solidFill>
+                  <a:srgbClr val="11202B"/>
+                </a:solidFill>
+                <a:latin typeface="Malgun Gothic"/>
+                <a:ea typeface="Malgun Gothic"/>
+                <a:cs typeface="Malgun Gothic"/>
+              </a:rPr>
+              <a:t>소수성 산물을 수용액에 분산시켜 상피 표면까지 나른다 — </a:t>
+            </a:r>
+            <a:r>
+              <a:rPr sz="1400" b="1" i="0">
+                <a:solidFill>
+                  <a:srgbClr val="11202B"/>
+                </a:solidFill>
+                <a:latin typeface="Malgun Gothic"/>
+                <a:ea typeface="Malgun Gothic"/>
+                <a:cs typeface="Malgun Gothic"/>
+              </a:rPr>
+              <a:t>mixed micelle</a:t>
+            </a:r>
+          </a:p>
         </p:txBody>
       </p:sp>
     </p:spTree>
@@ -19602,126 +19751,6 @@
             <a:spAutoFit/>
           </a:bodyPr>
           <a:lstStyle/>
-          <a:p>
-            <a:pPr>
-              <a:spcAft>
-                <a:spcPts val="900"/>
-              </a:spcAft>
-            </a:pPr>
-            <a:r>
-              <a:rPr sz="2000" b="1" i="0">
-                <a:solidFill>
-                  <a:srgbClr val="F2B705"/>
-                </a:solidFill>
-                <a:latin typeface="Malgun Gothic"/>
-                <a:ea typeface="Malgun Gothic"/>
-                <a:cs typeface="Malgun Gothic"/>
-              </a:rPr>
-              <a:t>•  </a:t>
-            </a:r>
-            <a:r>
-              <a:rPr sz="2000" b="0" i="0">
-                <a:solidFill>
-                  <a:srgbClr val="11202B"/>
-                </a:solidFill>
-                <a:latin typeface="Malgun Gothic"/>
-                <a:ea typeface="Malgun Gothic"/>
-                <a:cs typeface="Malgun Gothic"/>
-              </a:rPr>
-              <a:t>덩어리를 작은 입자로 쪼개 표면적을 늘린다 — </a:t>
-            </a:r>
-            <a:r>
-              <a:rPr sz="2000" b="1" i="0">
-                <a:solidFill>
-                  <a:srgbClr val="11202B"/>
-                </a:solidFill>
-                <a:latin typeface="Malgun Gothic"/>
-                <a:ea typeface="Malgun Gothic"/>
-                <a:cs typeface="Malgun Gothic"/>
-              </a:rPr>
-              <a:t>emulsification</a:t>
-            </a:r>
-          </a:p>
-          <a:p>
-            <a:pPr>
-              <a:spcAft>
-                <a:spcPts val="900"/>
-              </a:spcAft>
-            </a:pPr>
-            <a:r>
-              <a:rPr sz="2000" b="1" i="0">
-                <a:solidFill>
-                  <a:srgbClr val="F2B705"/>
-                </a:solidFill>
-                <a:latin typeface="Malgun Gothic"/>
-                <a:ea typeface="Malgun Gothic"/>
-                <a:cs typeface="Malgun Gothic"/>
-              </a:rPr>
-              <a:t>•  </a:t>
-            </a:r>
-            <a:r>
-              <a:rPr sz="2000" b="0" i="0">
-                <a:solidFill>
-                  <a:srgbClr val="11202B"/>
-                </a:solidFill>
-                <a:latin typeface="Malgun Gothic"/>
-                <a:ea typeface="Malgun Gothic"/>
-                <a:cs typeface="Malgun Gothic"/>
-              </a:rPr>
-              <a:t>수용성 효소가 계면에서 작동하게 한다 — </a:t>
-            </a:r>
-            <a:r>
-              <a:rPr sz="2000" b="1" i="0">
-                <a:solidFill>
-                  <a:srgbClr val="11202B"/>
-                </a:solidFill>
-                <a:latin typeface="Malgun Gothic"/>
-                <a:ea typeface="Malgun Gothic"/>
-                <a:cs typeface="Malgun Gothic"/>
-              </a:rPr>
-              <a:t>pancreatic lipase와 colipase</a:t>
-            </a:r>
-          </a:p>
-          <a:p>
-            <a:pPr>
-              <a:spcAft>
-                <a:spcPts val="900"/>
-              </a:spcAft>
-            </a:pPr>
-            <a:r>
-              <a:rPr sz="2000" b="1" i="0">
-                <a:solidFill>
-                  <a:srgbClr val="F2B705"/>
-                </a:solidFill>
-                <a:latin typeface="Malgun Gothic"/>
-                <a:ea typeface="Malgun Gothic"/>
-                <a:cs typeface="Malgun Gothic"/>
-              </a:rPr>
-              <a:t>•  </a:t>
-            </a:r>
-            <a:r>
-              <a:rPr sz="2000" b="0" i="0">
-                <a:solidFill>
-                  <a:srgbClr val="11202B"/>
-                </a:solidFill>
-                <a:latin typeface="Malgun Gothic"/>
-                <a:ea typeface="Malgun Gothic"/>
-                <a:cs typeface="Malgun Gothic"/>
-              </a:rPr>
-              <a:t>소수성 산물을 수용액에 분산시켜 상피 표면까지 나른다 — </a:t>
-            </a:r>
-            <a:r>
-              <a:rPr sz="2000" b="1" i="0">
-                <a:solidFill>
-                  <a:srgbClr val="11202B"/>
-                </a:solidFill>
-                <a:latin typeface="Malgun Gothic"/>
-                <a:ea typeface="Malgun Gothic"/>
-                <a:cs typeface="Malgun Gothic"/>
-              </a:rPr>
-              <a:t>mixed micelle</a:t>
-            </a:r>
-          </a:p>
           <a:p>
             <a:pPr>
               <a:spcAft>
